--- a/classes/parte-1-redes-y-seguridad-de-redes/043-network-security-monitoring-nsm-fundamentos/clase-043-presentacion.pptx
+++ b/classes/parte-1-redes-y-seguridad-de-redes/043-network-security-monitoring-nsm-fundamentos/clase-043-presentacion.pptx
@@ -17,6 +17,9 @@
     <p:sldId id="265" r:id="rId16"/>
     <p:sldId id="266" r:id="rId17"/>
     <p:sldId id="267" r:id="rId18"/>
+    <p:sldId id="268" r:id="rId19"/>
+    <p:sldId id="269" r:id="rId20"/>
+    <p:sldId id="270" r:id="rId21"/>
   </p:sldIdLst>
   <p:sldSz cx="9144000" cy="6858000" type="screen4x3"/>
   <p:notesSz cx="6858000" cy="9144000"/>
@@ -3198,7 +3201,7 @@
                   <a:srgbClr val="0B3D2E"/>
                 </a:solidFill>
               </a:rPr>
-              <a:t>⚠️ Errores comunes</a:t>
+              <a:t>✍️ Ejercicios</a:t>
             </a:r>
           </a:p>
         </p:txBody>
@@ -3236,67 +3239,82 @@
                   <a:srgbClr val="22282E"/>
                 </a:solidFill>
               </a:rPr>
-              <a:t>•  Security Onion sin datos — Sensor mal configurado o interfaz de monitoreo equivocada; revisa la config de captura</a:t>
-            </a:r>
-          </a:p>
-          <a:p>
-            <a:pPr>
-              <a:spcAft>
-                <a:spcPts val="600"/>
-              </a:spcAft>
-            </a:pPr>
-            <a:r>
-              <a:rPr sz="1500">
-                <a:solidFill>
-                  <a:srgbClr val="22282E"/>
-                </a:solidFill>
-              </a:rPr>
-              <a:t>•  Demasiadas alertas, nadie las mira — Falta afinado y priorización; ajusta reglas y define un flujo de triaje</a:t>
-            </a:r>
-          </a:p>
-          <a:p>
-            <a:pPr>
-              <a:spcAft>
-                <a:spcPts val="600"/>
-              </a:spcAft>
-            </a:pPr>
-            <a:r>
-              <a:rPr sz="1500">
-                <a:solidFill>
-                  <a:srgbClr val="22282E"/>
-                </a:solidFill>
-              </a:rPr>
-              <a:t>•  Solo se guardan alertas, no contexto — Sin session/transaction data no puedes investigar; habilita Zeek y retención de flujos</a:t>
-            </a:r>
-          </a:p>
-          <a:p>
-            <a:pPr>
-              <a:spcAft>
-                <a:spcPts val="600"/>
-              </a:spcAft>
-            </a:pPr>
-            <a:r>
-              <a:rPr sz="1500">
-                <a:solidFill>
-                  <a:srgbClr val="22282E"/>
-                </a:solidFill>
-              </a:rPr>
-              <a:t>•  Disco lleno por full content — Retención de pcap demasiado larga; limita por tiempo/tamaño y prioriza sesiones</a:t>
-            </a:r>
-          </a:p>
-          <a:p>
-            <a:pPr>
-              <a:spcAft>
-                <a:spcPts val="600"/>
-              </a:spcAft>
-            </a:pPr>
-            <a:r>
-              <a:rPr sz="1500">
-                <a:solidFill>
-                  <a:srgbClr val="22282E"/>
-                </a:solidFill>
-              </a:rPr>
-              <a:t>•  Sensor sin visibilidad — Mal colocado (no ve el tráfico relevante); usa TAP/SPAN en el punto correcto</a:t>
+              <a:t>•  Clasifica cada dato de un incidente en su tipo NSM (full content, sesión, transacción, alerta…).</a:t>
+            </a:r>
+          </a:p>
+          <a:p>
+            <a:pPr>
+              <a:spcAft>
+                <a:spcPts val="600"/>
+              </a:spcAft>
+            </a:pPr>
+            <a:r>
+              <a:rPr sz="1500">
+                <a:solidFill>
+                  <a:srgbClr val="22282E"/>
+                </a:solidFill>
+              </a:rPr>
+              <a:t>•  Justifica dónde colocarías un sensor para monitorizar el tráfico entre la DMZ y la red interna.</a:t>
+            </a:r>
+          </a:p>
+          <a:p>
+            <a:pPr>
+              <a:spcAft>
+                <a:spcPts val="600"/>
+              </a:spcAft>
+            </a:pPr>
+            <a:r>
+              <a:rPr sz="1500">
+                <a:solidFill>
+                  <a:srgbClr val="22282E"/>
+                </a:solidFill>
+              </a:rPr>
+              <a:t>•  A partir de una alerta, reconstruye la sesión completa usando los logs de Zeek.</a:t>
+            </a:r>
+          </a:p>
+          <a:p>
+            <a:pPr>
+              <a:spcAft>
+                <a:spcPts val="600"/>
+              </a:spcAft>
+            </a:pPr>
+            <a:r>
+              <a:rPr sz="1500">
+                <a:solidFill>
+                  <a:srgbClr val="22282E"/>
+                </a:solidFill>
+              </a:rPr>
+              <a:t>•  Formula tres hipótesis de threat hunting y describe qué dato NSM usarías para cada una.</a:t>
+            </a:r>
+          </a:p>
+          <a:p>
+            <a:pPr>
+              <a:spcAft>
+                <a:spcPts val="600"/>
+              </a:spcAft>
+            </a:pPr>
+            <a:r>
+              <a:rPr sz="1500">
+                <a:solidFill>
+                  <a:srgbClr val="22282E"/>
+                </a:solidFill>
+              </a:rPr>
+              <a:t>•  Explica el compromiso entre retención de full content y coste de almacenamiento.</a:t>
+            </a:r>
+          </a:p>
+          <a:p>
+            <a:pPr>
+              <a:spcAft>
+                <a:spcPts val="600"/>
+              </a:spcAft>
+            </a:pPr>
+            <a:r>
+              <a:rPr sz="1500">
+                <a:solidFill>
+                  <a:srgbClr val="22282E"/>
+                </a:solidFill>
+              </a:rPr>
+              <a:t>•  Define tres métricas para medir la eficacia de un programa NSM (p. ej. tiempo medio de detección).</a:t>
             </a:r>
           </a:p>
         </p:txBody>
@@ -3347,7 +3365,7 @@
                   <a:srgbClr val="0B3D2E"/>
                 </a:solidFill>
               </a:rPr>
-              <a:t>❓ Preguntas frecuentes</a:t>
+              <a:t>📝 Reto verificable</a:t>
             </a:r>
           </a:p>
         </p:txBody>
@@ -3385,97 +3403,22 @@
                   <a:srgbClr val="22282E"/>
                 </a:solidFill>
               </a:rPr>
-              <a:t>•  ❓ ¿NSM es lo mismo que un IDS?</a:t>
-            </a:r>
-          </a:p>
-          <a:p>
-            <a:pPr>
-              <a:spcAft>
-                <a:spcPts val="600"/>
-              </a:spcAft>
-            </a:pPr>
-            <a:r>
-              <a:rPr sz="1500">
-                <a:solidFill>
-                  <a:srgbClr val="22282E"/>
-                </a:solidFill>
-              </a:rPr>
-              <a:t>•  No. El IDS (alertas por firmas) es una fuente de datos dentro del NSM. El NSM abarca también sesión, transacción, full content y el proceso humano de análisis y respuesta.</a:t>
-            </a:r>
-          </a:p>
-          <a:p>
-            <a:pPr>
-              <a:spcAft>
-                <a:spcPts val="600"/>
-              </a:spcAft>
-            </a:pPr>
-            <a:r>
-              <a:rPr sz="1500">
-                <a:solidFill>
-                  <a:srgbClr val="22282E"/>
-                </a:solidFill>
-              </a:rPr>
-              <a:t>•  ❓ ¿Por qué guardar tráfico si tengo un IDS?</a:t>
-            </a:r>
-          </a:p>
-          <a:p>
-            <a:pPr>
-              <a:spcAft>
-                <a:spcPts val="600"/>
-              </a:spcAft>
-            </a:pPr>
-            <a:r>
-              <a:rPr sz="1500">
-                <a:solidFill>
-                  <a:srgbClr val="22282E"/>
-                </a:solidFill>
-              </a:rPr>
-              <a:t>•  Porque las firmas no lo detectan todo. Con datos de sesión y full content puedes investigar incidentes que ninguna firma alertó y reconstruir lo ocurrido.</a:t>
-            </a:r>
-          </a:p>
-          <a:p>
-            <a:pPr>
-              <a:spcAft>
-                <a:spcPts val="600"/>
-              </a:spcAft>
-            </a:pPr>
-            <a:r>
-              <a:rPr sz="1500">
-                <a:solidFill>
-                  <a:srgbClr val="22282E"/>
-                </a:solidFill>
-              </a:rPr>
-              <a:t>•  ❓ ¿NSM sustituye a la prevención?</a:t>
-            </a:r>
-          </a:p>
-          <a:p>
-            <a:pPr>
-              <a:spcAft>
-                <a:spcPts val="600"/>
-              </a:spcAft>
-            </a:pPr>
-            <a:r>
-              <a:rPr sz="1500">
-                <a:solidFill>
-                  <a:srgbClr val="22282E"/>
-                </a:solidFill>
-              </a:rPr>
-              <a:t>•  No, la complementa. Parte de que la prevención fallará y se centra en detectar y responder rápido para reducir el impacto.</a:t>
-            </a:r>
-          </a:p>
-          <a:p>
-            <a:pPr>
-              <a:spcAft>
-                <a:spcPts val="600"/>
-              </a:spcAft>
-            </a:pPr>
-            <a:r>
-              <a:rPr sz="1500">
-                <a:solidFill>
-                  <a:srgbClr val="22282E"/>
-                </a:solidFill>
-              </a:rPr>
-              <a:t>•  ❓ ¿Qué es threat hunting?</a:t>
+              <a:t>•  Con Security Onion (o Suricata+Zeek), procesa una captura que contenga actividad sospechosa (un escaneo y una descarga anómala que generes en tu laboratorio) y produce un "expediente" NSM del evento…</a:t>
+            </a:r>
+          </a:p>
+          <a:p>
+            <a:pPr>
+              <a:spcAft>
+                <a:spcPts val="600"/>
+              </a:spcAft>
+            </a:pPr>
+            <a:r>
+              <a:rPr sz="1500">
+                <a:solidFill>
+                  <a:srgbClr val="22282E"/>
+                </a:solidFill>
+              </a:rPr>
+              <a:t>•  Criterio de aceptación: el expediente enlaza correctamente alerta → logs → full content del mismo flujo, y la conclusión (incidente/falso positivo) está fundamentada en la evidencia recolectada.</a:t>
             </a:r>
           </a:p>
         </p:txBody>
@@ -3526,7 +3469,7 @@
                   <a:srgbClr val="0B3D2E"/>
                 </a:solidFill>
               </a:rPr>
-              <a:t>🔗 Referencias</a:t>
+              <a:t>⚠️ Errores comunes</a:t>
             </a:r>
           </a:p>
         </p:txBody>
@@ -3564,6 +3507,334 @@
                   <a:srgbClr val="22282E"/>
                 </a:solidFill>
               </a:rPr>
+              <a:t>•  Security Onion sin datos — Sensor mal configurado o interfaz de monitoreo equivocada; revisa la config de captura</a:t>
+            </a:r>
+          </a:p>
+          <a:p>
+            <a:pPr>
+              <a:spcAft>
+                <a:spcPts val="600"/>
+              </a:spcAft>
+            </a:pPr>
+            <a:r>
+              <a:rPr sz="1500">
+                <a:solidFill>
+                  <a:srgbClr val="22282E"/>
+                </a:solidFill>
+              </a:rPr>
+              <a:t>•  Demasiadas alertas, nadie las mira — Falta afinado y priorización; ajusta reglas y define un flujo de triaje</a:t>
+            </a:r>
+          </a:p>
+          <a:p>
+            <a:pPr>
+              <a:spcAft>
+                <a:spcPts val="600"/>
+              </a:spcAft>
+            </a:pPr>
+            <a:r>
+              <a:rPr sz="1500">
+                <a:solidFill>
+                  <a:srgbClr val="22282E"/>
+                </a:solidFill>
+              </a:rPr>
+              <a:t>•  Solo se guardan alertas, no contexto — Sin session/transaction data no puedes investigar; habilita Zeek y retención de flujos</a:t>
+            </a:r>
+          </a:p>
+          <a:p>
+            <a:pPr>
+              <a:spcAft>
+                <a:spcPts val="600"/>
+              </a:spcAft>
+            </a:pPr>
+            <a:r>
+              <a:rPr sz="1500">
+                <a:solidFill>
+                  <a:srgbClr val="22282E"/>
+                </a:solidFill>
+              </a:rPr>
+              <a:t>•  Disco lleno por full content — Retención de pcap demasiado larga; limita por tiempo/tamaño y prioriza sesiones</a:t>
+            </a:r>
+          </a:p>
+          <a:p>
+            <a:pPr>
+              <a:spcAft>
+                <a:spcPts val="600"/>
+              </a:spcAft>
+            </a:pPr>
+            <a:r>
+              <a:rPr sz="1500">
+                <a:solidFill>
+                  <a:srgbClr val="22282E"/>
+                </a:solidFill>
+              </a:rPr>
+              <a:t>•  Sensor sin visibilidad — Mal colocado (no ve el tráfico relevante); usa TAP/SPAN en el punto correcto</a:t>
+            </a:r>
+          </a:p>
+        </p:txBody>
+      </p:sp>
+    </p:spTree>
+  </p:cSld>
+  <p:clrMapOvr>
+    <a:masterClrMapping/>
+  </p:clrMapOvr>
+</p:sld>
+</file>
+
+<file path=ppt/slides/slide13.xml><?xml version="1.0" encoding="utf-8"?>
+<p:sld xmlns:a="http://schemas.openxmlformats.org/drawingml/2006/main" xmlns:p="http://schemas.openxmlformats.org/presentationml/2006/main" xmlns:r="http://schemas.openxmlformats.org/officeDocument/2006/relationships">
+  <p:cSld>
+    <p:spTree>
+      <p:nvGrpSpPr>
+        <p:cNvPr id="1" name=""/>
+        <p:cNvGrpSpPr/>
+        <p:nvPr/>
+      </p:nvGrpSpPr>
+      <p:grpSpPr/>
+      <p:sp>
+        <p:nvSpPr>
+          <p:cNvPr id="2" name="TextBox 1"/>
+          <p:cNvSpPr txBox="1"/>
+          <p:nvPr/>
+        </p:nvSpPr>
+        <p:spPr>
+          <a:xfrm>
+            <a:off x="457200" y="320040"/>
+            <a:ext cx="8229600" cy="822960"/>
+          </a:xfrm>
+          <a:prstGeom prst="rect">
+            <a:avLst/>
+          </a:prstGeom>
+          <a:noFill/>
+        </p:spPr>
+        <p:txBody>
+          <a:bodyPr wrap="square">
+            <a:spAutoFit/>
+          </a:bodyPr>
+          <a:lstStyle/>
+          <a:p>
+            <a:r>
+              <a:rPr sz="2600" b="1">
+                <a:solidFill>
+                  <a:srgbClr val="0B3D2E"/>
+                </a:solidFill>
+              </a:rPr>
+              <a:t>❓ Preguntas frecuentes</a:t>
+            </a:r>
+          </a:p>
+        </p:txBody>
+      </p:sp>
+      <p:sp>
+        <p:nvSpPr>
+          <p:cNvPr id="3" name="TextBox 2"/>
+          <p:cNvSpPr txBox="1"/>
+          <p:nvPr/>
+        </p:nvSpPr>
+        <p:spPr>
+          <a:xfrm>
+            <a:off x="457200" y="1280160"/>
+            <a:ext cx="8229600" cy="4937760"/>
+          </a:xfrm>
+          <a:prstGeom prst="rect">
+            <a:avLst/>
+          </a:prstGeom>
+          <a:noFill/>
+        </p:spPr>
+        <p:txBody>
+          <a:bodyPr wrap="square">
+            <a:spAutoFit/>
+          </a:bodyPr>
+          <a:lstStyle/>
+          <a:p>
+            <a:pPr>
+              <a:spcAft>
+                <a:spcPts val="600"/>
+              </a:spcAft>
+            </a:pPr>
+            <a:r>
+              <a:rPr sz="1500">
+                <a:solidFill>
+                  <a:srgbClr val="22282E"/>
+                </a:solidFill>
+              </a:rPr>
+              <a:t>•  ❓ ¿NSM es lo mismo que un IDS?</a:t>
+            </a:r>
+          </a:p>
+          <a:p>
+            <a:pPr>
+              <a:spcAft>
+                <a:spcPts val="600"/>
+              </a:spcAft>
+            </a:pPr>
+            <a:r>
+              <a:rPr sz="1500">
+                <a:solidFill>
+                  <a:srgbClr val="22282E"/>
+                </a:solidFill>
+              </a:rPr>
+              <a:t>•  No. El IDS (alertas por firmas) es una fuente de datos dentro del NSM. El NSM abarca también sesión, transacción, full content y el proceso humano de análisis y respuesta.</a:t>
+            </a:r>
+          </a:p>
+          <a:p>
+            <a:pPr>
+              <a:spcAft>
+                <a:spcPts val="600"/>
+              </a:spcAft>
+            </a:pPr>
+            <a:r>
+              <a:rPr sz="1500">
+                <a:solidFill>
+                  <a:srgbClr val="22282E"/>
+                </a:solidFill>
+              </a:rPr>
+              <a:t>•  ❓ ¿Por qué guardar tráfico si tengo un IDS?</a:t>
+            </a:r>
+          </a:p>
+          <a:p>
+            <a:pPr>
+              <a:spcAft>
+                <a:spcPts val="600"/>
+              </a:spcAft>
+            </a:pPr>
+            <a:r>
+              <a:rPr sz="1500">
+                <a:solidFill>
+                  <a:srgbClr val="22282E"/>
+                </a:solidFill>
+              </a:rPr>
+              <a:t>•  Porque las firmas no lo detectan todo. Con datos de sesión y full content puedes investigar incidentes que ninguna firma alertó y reconstruir lo ocurrido.</a:t>
+            </a:r>
+          </a:p>
+          <a:p>
+            <a:pPr>
+              <a:spcAft>
+                <a:spcPts val="600"/>
+              </a:spcAft>
+            </a:pPr>
+            <a:r>
+              <a:rPr sz="1500">
+                <a:solidFill>
+                  <a:srgbClr val="22282E"/>
+                </a:solidFill>
+              </a:rPr>
+              <a:t>•  ❓ ¿NSM sustituye a la prevención?</a:t>
+            </a:r>
+          </a:p>
+          <a:p>
+            <a:pPr>
+              <a:spcAft>
+                <a:spcPts val="600"/>
+              </a:spcAft>
+            </a:pPr>
+            <a:r>
+              <a:rPr sz="1500">
+                <a:solidFill>
+                  <a:srgbClr val="22282E"/>
+                </a:solidFill>
+              </a:rPr>
+              <a:t>•  No, la complementa. Parte de que la prevención fallará y se centra en detectar y responder rápido para reducir el impacto.</a:t>
+            </a:r>
+          </a:p>
+          <a:p>
+            <a:pPr>
+              <a:spcAft>
+                <a:spcPts val="600"/>
+              </a:spcAft>
+            </a:pPr>
+            <a:r>
+              <a:rPr sz="1500">
+                <a:solidFill>
+                  <a:srgbClr val="22282E"/>
+                </a:solidFill>
+              </a:rPr>
+              <a:t>•  ❓ ¿Qué es threat hunting?</a:t>
+            </a:r>
+          </a:p>
+        </p:txBody>
+      </p:sp>
+    </p:spTree>
+  </p:cSld>
+  <p:clrMapOvr>
+    <a:masterClrMapping/>
+  </p:clrMapOvr>
+</p:sld>
+</file>
+
+<file path=ppt/slides/slide14.xml><?xml version="1.0" encoding="utf-8"?>
+<p:sld xmlns:a="http://schemas.openxmlformats.org/drawingml/2006/main" xmlns:p="http://schemas.openxmlformats.org/presentationml/2006/main" xmlns:r="http://schemas.openxmlformats.org/officeDocument/2006/relationships">
+  <p:cSld>
+    <p:spTree>
+      <p:nvGrpSpPr>
+        <p:cNvPr id="1" name=""/>
+        <p:cNvGrpSpPr/>
+        <p:nvPr/>
+      </p:nvGrpSpPr>
+      <p:grpSpPr/>
+      <p:sp>
+        <p:nvSpPr>
+          <p:cNvPr id="2" name="TextBox 1"/>
+          <p:cNvSpPr txBox="1"/>
+          <p:nvPr/>
+        </p:nvSpPr>
+        <p:spPr>
+          <a:xfrm>
+            <a:off x="457200" y="320040"/>
+            <a:ext cx="8229600" cy="822960"/>
+          </a:xfrm>
+          <a:prstGeom prst="rect">
+            <a:avLst/>
+          </a:prstGeom>
+          <a:noFill/>
+        </p:spPr>
+        <p:txBody>
+          <a:bodyPr wrap="square">
+            <a:spAutoFit/>
+          </a:bodyPr>
+          <a:lstStyle/>
+          <a:p>
+            <a:r>
+              <a:rPr sz="2600" b="1">
+                <a:solidFill>
+                  <a:srgbClr val="0B3D2E"/>
+                </a:solidFill>
+              </a:rPr>
+              <a:t>🔗 Referencias</a:t>
+            </a:r>
+          </a:p>
+        </p:txBody>
+      </p:sp>
+      <p:sp>
+        <p:nvSpPr>
+          <p:cNvPr id="3" name="TextBox 2"/>
+          <p:cNvSpPr txBox="1"/>
+          <p:nvPr/>
+        </p:nvSpPr>
+        <p:spPr>
+          <a:xfrm>
+            <a:off x="457200" y="1280160"/>
+            <a:ext cx="8229600" cy="4937760"/>
+          </a:xfrm>
+          <a:prstGeom prst="rect">
+            <a:avLst/>
+          </a:prstGeom>
+          <a:noFill/>
+        </p:spPr>
+        <p:txBody>
+          <a:bodyPr wrap="square">
+            <a:spAutoFit/>
+          </a:bodyPr>
+          <a:lstStyle/>
+          <a:p>
+            <a:pPr>
+              <a:spcAft>
+                <a:spcPts val="600"/>
+              </a:spcAft>
+            </a:pPr>
+            <a:r>
+              <a:rPr sz="1500">
+                <a:solidFill>
+                  <a:srgbClr val="22282E"/>
+                </a:solidFill>
+              </a:rPr>
               <a:t>•  Bejtlich, R. The Practice of Network Security Monitoring. No Starch Press. &lt;https://nostarch.com/nsm&gt;</a:t>
             </a:r>
           </a:p>
@@ -3614,6 +3885,81 @@
           </a:p>
         </p:txBody>
       </p:sp>
+    </p:spTree>
+  </p:cSld>
+  <p:clrMapOvr>
+    <a:masterClrMapping/>
+  </p:clrMapOvr>
+</p:sld>
+</file>
+
+<file path=ppt/slides/slide15.xml><?xml version="1.0" encoding="utf-8"?>
+<p:sld xmlns:a="http://schemas.openxmlformats.org/drawingml/2006/main" xmlns:p="http://schemas.openxmlformats.org/presentationml/2006/main" xmlns:r="http://schemas.openxmlformats.org/officeDocument/2006/relationships">
+  <p:cSld>
+    <p:spTree>
+      <p:nvGrpSpPr>
+        <p:cNvPr id="1" name=""/>
+        <p:cNvGrpSpPr/>
+        <p:nvPr/>
+      </p:nvGrpSpPr>
+      <p:grpSpPr/>
+      <p:sp>
+        <p:nvSpPr>
+          <p:cNvPr id="2" name="TextBox 1"/>
+          <p:cNvSpPr txBox="1"/>
+          <p:nvPr/>
+        </p:nvSpPr>
+        <p:spPr>
+          <a:xfrm>
+            <a:off x="457200" y="274320"/>
+            <a:ext cx="8229600" cy="640080"/>
+          </a:xfrm>
+          <a:prstGeom prst="rect">
+            <a:avLst/>
+          </a:prstGeom>
+          <a:noFill/>
+        </p:spPr>
+        <p:txBody>
+          <a:bodyPr wrap="square">
+            <a:spAutoFit/>
+          </a:bodyPr>
+          <a:lstStyle/>
+          <a:p>
+            <a:r>
+              <a:rPr sz="2200" b="1">
+                <a:solidFill>
+                  <a:srgbClr val="0B3D2E"/>
+                </a:solidFill>
+              </a:rPr>
+              <a:t>Diagrama de la clase</a:t>
+            </a:r>
+          </a:p>
+        </p:txBody>
+      </p:sp>
+      <p:pic>
+        <p:nvPicPr>
+          <p:cNvPr id="3" name="Picture 2" descr="7be3fbf174befe66.png"/>
+          <p:cNvPicPr>
+            <a:picLocks noChangeAspect="1"/>
+          </p:cNvPicPr>
+          <p:nvPr/>
+        </p:nvPicPr>
+        <p:blipFill>
+          <a:blip r:embed="rId2"/>
+          <a:stretch>
+            <a:fillRect/>
+          </a:stretch>
+        </p:blipFill>
+        <p:spPr>
+          <a:xfrm>
+            <a:off x="1758334" y="1097280"/>
+            <a:ext cx="5627332" cy="5303520"/>
+          </a:xfrm>
+          <a:prstGeom prst="rect">
+            <a:avLst/>
+          </a:prstGeom>
+        </p:spPr>
+      </p:pic>
     </p:spTree>
   </p:cSld>
   <p:clrMapOvr>
@@ -3698,7 +4044,7 @@
                   <a:srgbClr val="22282E"/>
                 </a:solidFill>
               </a:rPr>
-              <a:t>•  Introducir el Network Security Monitoring como disciplina: la recolección, análisis y escalado de indicadores de red para detectar y responder a intrusiones, partiendo de la premisa de que la prevención eventualmente falla. El alumno conocerá los tipos de datos NSM, el ciclo de detección y las plataformas que lo implementan (Security Onion).</a:t>
+              <a:t>•  Introducir el Network Security Monitoring como disciplina: la recolección, análisis y escalado de indicadores de red para detectar y responder a intrusiones, partiendo de la premisa de que la…</a:t>
             </a:r>
           </a:p>
         </p:txBody>
@@ -4107,7 +4453,7 @@
                   <a:srgbClr val="0B3D2E"/>
                 </a:solidFill>
               </a:rPr>
-              <a:t>📖 Definiciones y características</a:t>
+              <a:t>🧠 Explicación en profundidad</a:t>
             </a:r>
           </a:p>
         </p:txBody>
@@ -4145,82 +4491,97 @@
                   <a:srgbClr val="22282E"/>
                 </a:solidFill>
               </a:rPr>
-              <a:t>•  NSM: recolección, análisis y escalado de indicaciones y advertencias para detectar y responder a intrusiones; asume que el atacante entrará y busca detectarlo pronto.</a:t>
-            </a:r>
-          </a:p>
-          <a:p>
-            <a:pPr>
-              <a:spcAft>
-                <a:spcPts val="600"/>
-              </a:spcAft>
-            </a:pPr>
-            <a:r>
-              <a:rPr sz="1500">
-                <a:solidFill>
-                  <a:srgbClr val="22282E"/>
-                </a:solidFill>
-              </a:rPr>
-              <a:t>•  Full content data: captura completa de paquetes (pcap); máxima fidelidad, alto coste de almacenamiento.</a:t>
-            </a:r>
-          </a:p>
-          <a:p>
-            <a:pPr>
-              <a:spcAft>
-                <a:spcPts val="600"/>
-              </a:spcAft>
-            </a:pPr>
-            <a:r>
-              <a:rPr sz="1500">
-                <a:solidFill>
-                  <a:srgbClr val="22282E"/>
-                </a:solidFill>
-              </a:rPr>
-              <a:t>•  Session/flow data: resumen de conexiones (5-tupla, bytes, duración); eficiente y muy útil para investigación.</a:t>
-            </a:r>
-          </a:p>
-          <a:p>
-            <a:pPr>
-              <a:spcAft>
-                <a:spcPts val="600"/>
-              </a:spcAft>
-            </a:pPr>
-            <a:r>
-              <a:rPr sz="1500">
-                <a:solidFill>
-                  <a:srgbClr val="22282E"/>
-                </a:solidFill>
-              </a:rPr>
-              <a:t>•  Transaction data: registros de protocolo de alto nivel (peticiones HTTP, consultas DNS, handshakes TLS) como los que produce Zeek.</a:t>
-            </a:r>
-          </a:p>
-          <a:p>
-            <a:pPr>
-              <a:spcAft>
-                <a:spcPts val="600"/>
-              </a:spcAft>
-            </a:pPr>
-            <a:r>
-              <a:rPr sz="1500">
-                <a:solidFill>
-                  <a:srgbClr val="22282E"/>
-                </a:solidFill>
-              </a:rPr>
-              <a:t>•  Alert data: salidas de IDS/IPS (Suricata/Snort) que señalan coincidencias con firmas.</a:t>
-            </a:r>
-          </a:p>
-          <a:p>
-            <a:pPr>
-              <a:spcAft>
-                <a:spcPts val="600"/>
-              </a:spcAft>
-            </a:pPr>
-            <a:r>
-              <a:rPr sz="1500">
-                <a:solidFill>
-                  <a:srgbClr val="22282E"/>
-                </a:solidFill>
-              </a:rPr>
-              <a:t>•  Threat hunting: búsqueda proactiva de amenazas guiada por hipótesis, sin depender de una alerta previa.</a:t>
+              <a:t>•  El Network Security Monitoring parte de una idea de Richard Bejtlich tan sobria como</a:t>
+            </a:r>
+          </a:p>
+          <a:p>
+            <a:pPr>
+              <a:spcAft>
+                <a:spcPts val="600"/>
+              </a:spcAft>
+            </a:pPr>
+            <a:r>
+              <a:rPr sz="1500">
+                <a:solidFill>
+                  <a:srgbClr val="22282E"/>
+                </a:solidFill>
+              </a:rPr>
+              <a:t>•  poderosa: la prevención acabará fallando, así que hay que construir la capacidad de</a:t>
+            </a:r>
+          </a:p>
+          <a:p>
+            <a:pPr>
+              <a:spcAft>
+                <a:spcPts val="600"/>
+              </a:spcAft>
+            </a:pPr>
+            <a:r>
+              <a:rPr sz="1500">
+                <a:solidFill>
+                  <a:srgbClr val="22282E"/>
+                </a:solidFill>
+              </a:rPr>
+              <a:t>•  detectar y responder con la misma seriedad con que se construyen los muros. NSM no es</a:t>
+            </a:r>
+          </a:p>
+          <a:p>
+            <a:pPr>
+              <a:spcAft>
+                <a:spcPts val="600"/>
+              </a:spcAft>
+            </a:pPr>
+            <a:r>
+              <a:rPr sz="1500">
+                <a:solidFill>
+                  <a:srgbClr val="22282E"/>
+                </a:solidFill>
+              </a:rPr>
+              <a:t>•  un producto: es una disciplina de recolectar, mantener y analizar datos de red para</a:t>
+            </a:r>
+          </a:p>
+          <a:p>
+            <a:pPr>
+              <a:spcAft>
+                <a:spcPts val="600"/>
+              </a:spcAft>
+            </a:pPr>
+            <a:r>
+              <a:rPr sz="1500">
+                <a:solidFill>
+                  <a:srgbClr val="22282E"/>
+                </a:solidFill>
+              </a:rPr>
+              <a:t>•  encontrar al intruso que ya está dentro y reconstruir lo que hizo. Cambia la pregunta de</a:t>
+            </a:r>
+          </a:p>
+          <a:p>
+            <a:pPr>
+              <a:spcAft>
+                <a:spcPts val="600"/>
+              </a:spcAft>
+            </a:pPr>
+            <a:r>
+              <a:rPr sz="1500">
+                <a:solidFill>
+                  <a:srgbClr val="22282E"/>
+                </a:solidFill>
+              </a:rPr>
+              <a:t>•  "¿cómo impido que entren?" —importante pero insuficiente— por "¿cómo me entero de que</a:t>
+            </a:r>
+          </a:p>
+          <a:p>
+            <a:pPr>
+              <a:spcAft>
+                <a:spcPts val="600"/>
+              </a:spcAft>
+            </a:pPr>
+            <a:r>
+              <a:rPr sz="1500">
+                <a:solidFill>
+                  <a:srgbClr val="22282E"/>
+                </a:solidFill>
+              </a:rPr>
+              <a:t>•  entraron, y qué evidencia tengo para responder?".</a:t>
             </a:r>
           </a:p>
         </p:txBody>
@@ -4271,7 +4632,7 @@
                   <a:srgbClr val="0B3D2E"/>
                 </a:solidFill>
               </a:rPr>
-              <a:t>🧰 Herramientas y preparación</a:t>
+              <a:t>📖 Definiciones y características</a:t>
             </a:r>
           </a:p>
         </p:txBody>
@@ -4309,52 +4670,82 @@
                   <a:srgbClr val="22282E"/>
                 </a:solidFill>
               </a:rPr>
-              <a:t>•  Security Onion 2.x (distribución NSM que integra Suricata, Zeek, Stenographer, Elastic, Kibana).</a:t>
-            </a:r>
-          </a:p>
-          <a:p>
-            <a:pPr>
-              <a:spcAft>
-                <a:spcPts val="600"/>
-              </a:spcAft>
-            </a:pPr>
-            <a:r>
-              <a:rPr sz="1500">
-                <a:solidFill>
-                  <a:srgbClr val="22282E"/>
-                </a:solidFill>
-              </a:rPr>
-              <a:t>•  Alternativa ligera: Suricata + Zeek + un almacén de logs propio.</a:t>
-            </a:r>
-          </a:p>
-          <a:p>
-            <a:pPr>
-              <a:spcAft>
-                <a:spcPts val="600"/>
-              </a:spcAft>
-            </a:pPr>
-            <a:r>
-              <a:rPr sz="1500">
-                <a:solidFill>
-                  <a:srgbClr val="22282E"/>
-                </a:solidFill>
-              </a:rPr>
-              <a:t>•  Un TAP/SPAN o interfaz de captura en el laboratorio con tráfico representativo.</a:t>
-            </a:r>
-          </a:p>
-          <a:p>
-            <a:pPr>
-              <a:spcAft>
-                <a:spcPts val="600"/>
-              </a:spcAft>
-            </a:pPr>
-            <a:r>
-              <a:rPr sz="1500">
-                <a:solidFill>
-                  <a:srgbClr val="22282E"/>
-                </a:solidFill>
-              </a:rPr>
-              <a:t>•  Recursos: una VM con suficiente RAM (Security Onion pide bastante).</a:t>
+              <a:t>•  NSM: recolección, análisis y escalado de indicaciones y advertencias para detectar y responder a intrusiones; asume que el atacante entrará y busca detectarlo pronto.</a:t>
+            </a:r>
+          </a:p>
+          <a:p>
+            <a:pPr>
+              <a:spcAft>
+                <a:spcPts val="600"/>
+              </a:spcAft>
+            </a:pPr>
+            <a:r>
+              <a:rPr sz="1500">
+                <a:solidFill>
+                  <a:srgbClr val="22282E"/>
+                </a:solidFill>
+              </a:rPr>
+              <a:t>•  Full content data: captura completa de paquetes (pcap); máxima fidelidad, alto coste de almacenamiento.</a:t>
+            </a:r>
+          </a:p>
+          <a:p>
+            <a:pPr>
+              <a:spcAft>
+                <a:spcPts val="600"/>
+              </a:spcAft>
+            </a:pPr>
+            <a:r>
+              <a:rPr sz="1500">
+                <a:solidFill>
+                  <a:srgbClr val="22282E"/>
+                </a:solidFill>
+              </a:rPr>
+              <a:t>•  Session/flow data: resumen de conexiones (5-tupla, bytes, duración); eficiente y muy útil para investigación.</a:t>
+            </a:r>
+          </a:p>
+          <a:p>
+            <a:pPr>
+              <a:spcAft>
+                <a:spcPts val="600"/>
+              </a:spcAft>
+            </a:pPr>
+            <a:r>
+              <a:rPr sz="1500">
+                <a:solidFill>
+                  <a:srgbClr val="22282E"/>
+                </a:solidFill>
+              </a:rPr>
+              <a:t>•  Transaction data: registros de protocolo de alto nivel (peticiones HTTP, consultas DNS, handshakes TLS) como los que produce Zeek.</a:t>
+            </a:r>
+          </a:p>
+          <a:p>
+            <a:pPr>
+              <a:spcAft>
+                <a:spcPts val="600"/>
+              </a:spcAft>
+            </a:pPr>
+            <a:r>
+              <a:rPr sz="1500">
+                <a:solidFill>
+                  <a:srgbClr val="22282E"/>
+                </a:solidFill>
+              </a:rPr>
+              <a:t>•  Alert data: salidas de IDS/IPS (Suricata/Snort) que señalan coincidencias con firmas.</a:t>
+            </a:r>
+          </a:p>
+          <a:p>
+            <a:pPr>
+              <a:spcAft>
+                <a:spcPts val="600"/>
+              </a:spcAft>
+            </a:pPr>
+            <a:r>
+              <a:rPr sz="1500">
+                <a:solidFill>
+                  <a:srgbClr val="22282E"/>
+                </a:solidFill>
+              </a:rPr>
+              <a:t>•  Threat hunting: búsqueda proactiva de amenazas guiada por hipótesis, sin depender de una alerta previa.</a:t>
             </a:r>
           </a:p>
         </p:txBody>
@@ -4405,7 +4796,7 @@
                   <a:srgbClr val="0B3D2E"/>
                 </a:solidFill>
               </a:rPr>
-              <a:t>🧪 Laboratorio guiado</a:t>
+              <a:t>📔 Glosario</a:t>
             </a:r>
           </a:p>
         </p:txBody>
@@ -4443,97 +4834,97 @@
                   <a:srgbClr val="22282E"/>
                 </a:solidFill>
               </a:rPr>
-              <a:t>•  Despliega Security Onion en una VM (modo import/eval para laboratorio) y accede a su consola web.</a:t>
-            </a:r>
-          </a:p>
-          <a:p>
-            <a:pPr>
-              <a:spcAft>
-                <a:spcPts val="600"/>
-              </a:spcAft>
-            </a:pPr>
-            <a:r>
-              <a:rPr sz="1500">
-                <a:solidFill>
-                  <a:srgbClr val="22282E"/>
-                </a:solidFill>
-              </a:rPr>
-              <a:t>•  Importa un pcap representativo (o el lab027.pcapng de clases previas) mediante so-import-pcap:</a:t>
-            </a:r>
-          </a:p>
-          <a:p>
-            <a:pPr>
-              <a:spcAft>
-                <a:spcPts val="600"/>
-              </a:spcAft>
-            </a:pPr>
-            <a:r>
-              <a:rPr sz="1500">
-                <a:solidFill>
-                  <a:srgbClr val="22282E"/>
-                </a:solidFill>
-              </a:rPr>
-              <a:t>•  sudo so-import-pcap /ruta/lab027.pcapng</a:t>
-            </a:r>
-          </a:p>
-          <a:p>
-            <a:pPr>
-              <a:spcAft>
-                <a:spcPts val="600"/>
-              </a:spcAft>
-            </a:pPr>
-            <a:r>
-              <a:rPr sz="1500">
-                <a:solidFill>
-                  <a:srgbClr val="22282E"/>
-                </a:solidFill>
-              </a:rPr>
-              <a:t>•  Explora las alertas en la interfaz (Alerts): identifica qué firmas de Suricata dispararon.</a:t>
-            </a:r>
-          </a:p>
-          <a:p>
-            <a:pPr>
-              <a:spcAft>
-                <a:spcPts val="600"/>
-              </a:spcAft>
-            </a:pPr>
-            <a:r>
-              <a:rPr sz="1500">
-                <a:solidFill>
-                  <a:srgbClr val="22282E"/>
-                </a:solidFill>
-              </a:rPr>
-              <a:t>•  Pivota a los logs de Zeek: para una alerta, abre los registros de sesión (conn.log), HTTP (http.log) y DNS (dns.log) asociados.</a:t>
-            </a:r>
-          </a:p>
-          <a:p>
-            <a:pPr>
-              <a:spcAft>
-                <a:spcPts val="600"/>
-              </a:spcAft>
-            </a:pPr>
-            <a:r>
-              <a:rPr sz="1500">
-                <a:solidFill>
-                  <a:srgbClr val="22282E"/>
-                </a:solidFill>
-              </a:rPr>
-              <a:t>•  Recupera el full content: desde una alerta, extrae el pcap del flujo y ábrelo en Wireshark para el análisis fino.</a:t>
-            </a:r>
-          </a:p>
-          <a:p>
-            <a:pPr>
-              <a:spcAft>
-                <a:spcPts val="600"/>
-              </a:spcAft>
-            </a:pPr>
-            <a:r>
-              <a:rPr sz="1500">
-                <a:solidFill>
-                  <a:srgbClr val="22282E"/>
-                </a:solidFill>
-              </a:rPr>
-              <a:t>•  Recorre el ciclo NSM: documenta detección (alerta) → análisis (logs + pcap) → decisión (falso positivo o incidente) → escalado.</a:t>
+              <a:t>•  Término — Definición concisa</a:t>
+            </a:r>
+          </a:p>
+          <a:p>
+            <a:pPr>
+              <a:spcAft>
+                <a:spcPts val="600"/>
+              </a:spcAft>
+            </a:pPr>
+            <a:r>
+              <a:rPr sz="1500">
+                <a:solidFill>
+                  <a:srgbClr val="22282E"/>
+                </a:solidFill>
+              </a:rPr>
+              <a:t>•  NSM — Recolección y análisis de datos de red para detectar y responder</a:t>
+            </a:r>
+          </a:p>
+          <a:p>
+            <a:pPr>
+              <a:spcAft>
+                <a:spcPts val="600"/>
+              </a:spcAft>
+            </a:pPr>
+            <a:r>
+              <a:rPr sz="1500">
+                <a:solidFill>
+                  <a:srgbClr val="22282E"/>
+                </a:solidFill>
+              </a:rPr>
+              <a:t>•  Bejtlich — Autor que formalizó la disciplina de NSM</a:t>
+            </a:r>
+          </a:p>
+          <a:p>
+            <a:pPr>
+              <a:spcAft>
+                <a:spcPts val="600"/>
+              </a:spcAft>
+            </a:pPr>
+            <a:r>
+              <a:rPr sz="1500">
+                <a:solidFill>
+                  <a:srgbClr val="22282E"/>
+                </a:solidFill>
+              </a:rPr>
+              <a:t>•  Contenido completo — Captura íntegra de paquetes; máxima fidelidad, alto coste</a:t>
+            </a:r>
+          </a:p>
+          <a:p>
+            <a:pPr>
+              <a:spcAft>
+                <a:spcPts val="600"/>
+              </a:spcAft>
+            </a:pPr>
+            <a:r>
+              <a:rPr sz="1500">
+                <a:solidFill>
+                  <a:srgbClr val="22282E"/>
+                </a:solidFill>
+              </a:rPr>
+              <a:t>•  Datos de transacción — Resumen estructurado por conexión y operación (logs de Zeek)</a:t>
+            </a:r>
+          </a:p>
+          <a:p>
+            <a:pPr>
+              <a:spcAft>
+                <a:spcPts val="600"/>
+              </a:spcAft>
+            </a:pPr>
+            <a:r>
+              <a:rPr sz="1500">
+                <a:solidFill>
+                  <a:srgbClr val="22282E"/>
+                </a:solidFill>
+              </a:rPr>
+              <a:t>•  Datos de sesión / flujo — Metadatos por conexión (5-tupla, bytes, duración); baratos</a:t>
+            </a:r>
+          </a:p>
+          <a:p>
+            <a:pPr>
+              <a:spcAft>
+                <a:spcPts val="600"/>
+              </a:spcAft>
+            </a:pPr>
+            <a:r>
+              <a:rPr sz="1500">
+                <a:solidFill>
+                  <a:srgbClr val="22282E"/>
+                </a:solidFill>
+              </a:rPr>
+              <a:t>•  Alertas — Salida de los IDS/IPS</a:t>
             </a:r>
           </a:p>
         </p:txBody>
@@ -4584,7 +4975,7 @@
                   <a:srgbClr val="0B3D2E"/>
                 </a:solidFill>
               </a:rPr>
-              <a:t>✍️ Ejercicios</a:t>
+              <a:t>🧰 Herramientas y preparación</a:t>
             </a:r>
           </a:p>
         </p:txBody>
@@ -4622,82 +5013,52 @@
                   <a:srgbClr val="22282E"/>
                 </a:solidFill>
               </a:rPr>
-              <a:t>•  Clasifica cada dato de un incidente en su tipo NSM (full content, sesión, transacción, alerta…).</a:t>
-            </a:r>
-          </a:p>
-          <a:p>
-            <a:pPr>
-              <a:spcAft>
-                <a:spcPts val="600"/>
-              </a:spcAft>
-            </a:pPr>
-            <a:r>
-              <a:rPr sz="1500">
-                <a:solidFill>
-                  <a:srgbClr val="22282E"/>
-                </a:solidFill>
-              </a:rPr>
-              <a:t>•  Justifica dónde colocarías un sensor para monitorizar el tráfico entre la DMZ y la red interna.</a:t>
-            </a:r>
-          </a:p>
-          <a:p>
-            <a:pPr>
-              <a:spcAft>
-                <a:spcPts val="600"/>
-              </a:spcAft>
-            </a:pPr>
-            <a:r>
-              <a:rPr sz="1500">
-                <a:solidFill>
-                  <a:srgbClr val="22282E"/>
-                </a:solidFill>
-              </a:rPr>
-              <a:t>•  A partir de una alerta, reconstruye la sesión completa usando los logs de Zeek.</a:t>
-            </a:r>
-          </a:p>
-          <a:p>
-            <a:pPr>
-              <a:spcAft>
-                <a:spcPts val="600"/>
-              </a:spcAft>
-            </a:pPr>
-            <a:r>
-              <a:rPr sz="1500">
-                <a:solidFill>
-                  <a:srgbClr val="22282E"/>
-                </a:solidFill>
-              </a:rPr>
-              <a:t>•  Formula tres hipótesis de threat hunting y describe qué dato NSM usarías para cada una.</a:t>
-            </a:r>
-          </a:p>
-          <a:p>
-            <a:pPr>
-              <a:spcAft>
-                <a:spcPts val="600"/>
-              </a:spcAft>
-            </a:pPr>
-            <a:r>
-              <a:rPr sz="1500">
-                <a:solidFill>
-                  <a:srgbClr val="22282E"/>
-                </a:solidFill>
-              </a:rPr>
-              <a:t>•  Explica el compromiso entre retención de full content y coste de almacenamiento.</a:t>
-            </a:r>
-          </a:p>
-          <a:p>
-            <a:pPr>
-              <a:spcAft>
-                <a:spcPts val="600"/>
-              </a:spcAft>
-            </a:pPr>
-            <a:r>
-              <a:rPr sz="1500">
-                <a:solidFill>
-                  <a:srgbClr val="22282E"/>
-                </a:solidFill>
-              </a:rPr>
-              <a:t>•  Define tres métricas para medir la eficacia de un programa NSM (p. ej. tiempo medio de detección).</a:t>
+              <a:t>•  Security Onion 2.x (distribución NSM que integra Suricata, Zeek, Stenographer, Elastic, Kibana).</a:t>
+            </a:r>
+          </a:p>
+          <a:p>
+            <a:pPr>
+              <a:spcAft>
+                <a:spcPts val="600"/>
+              </a:spcAft>
+            </a:pPr>
+            <a:r>
+              <a:rPr sz="1500">
+                <a:solidFill>
+                  <a:srgbClr val="22282E"/>
+                </a:solidFill>
+              </a:rPr>
+              <a:t>•  Alternativa ligera: Suricata + Zeek + un almacén de logs propio.</a:t>
+            </a:r>
+          </a:p>
+          <a:p>
+            <a:pPr>
+              <a:spcAft>
+                <a:spcPts val="600"/>
+              </a:spcAft>
+            </a:pPr>
+            <a:r>
+              <a:rPr sz="1500">
+                <a:solidFill>
+                  <a:srgbClr val="22282E"/>
+                </a:solidFill>
+              </a:rPr>
+              <a:t>•  Un TAP/SPAN o interfaz de captura en el laboratorio con tráfico representativo.</a:t>
+            </a:r>
+          </a:p>
+          <a:p>
+            <a:pPr>
+              <a:spcAft>
+                <a:spcPts val="600"/>
+              </a:spcAft>
+            </a:pPr>
+            <a:r>
+              <a:rPr sz="1500">
+                <a:solidFill>
+                  <a:srgbClr val="22282E"/>
+                </a:solidFill>
+              </a:rPr>
+              <a:t>•  Recursos: una VM con suficiente RAM (Security Onion pide bastante).</a:t>
             </a:r>
           </a:p>
         </p:txBody>
@@ -4748,7 +5109,7 @@
                   <a:srgbClr val="0B3D2E"/>
                 </a:solidFill>
               </a:rPr>
-              <a:t>📝 Reto verificable</a:t>
+              <a:t>🧪 Laboratorio guiado</a:t>
             </a:r>
           </a:p>
         </p:txBody>
@@ -4786,22 +5147,97 @@
                   <a:srgbClr val="22282E"/>
                 </a:solidFill>
               </a:rPr>
-              <a:t>•  Con Security Onion (o Suricata+Zeek), procesa una captura que contenga actividad sospechosa (un escaneo y una descarga anómala que generes en tu laboratorio) y produce un "expediente" NSM del evento: la alerta que lo detectó, los logs de sesión y transacción que lo contextualizan, y el pcap del flujo. Concluye si es incidente o falso positivo y por qué.</a:t>
-            </a:r>
-          </a:p>
-          <a:p>
-            <a:pPr>
-              <a:spcAft>
-                <a:spcPts val="600"/>
-              </a:spcAft>
-            </a:pPr>
-            <a:r>
-              <a:rPr sz="1500">
-                <a:solidFill>
-                  <a:srgbClr val="22282E"/>
-                </a:solidFill>
-              </a:rPr>
-              <a:t>•  Criterio de aceptación: el expediente enlaza correctamente alerta → logs → full content del mismo flujo, y la conclusión (incidente/falso positivo) está fundamentada en la evidencia recolectada.</a:t>
+              <a:t>•  Despliega Security Onion en una VM (modo import/eval para laboratorio) y accede a su consola web.</a:t>
+            </a:r>
+          </a:p>
+          <a:p>
+            <a:pPr>
+              <a:spcAft>
+                <a:spcPts val="600"/>
+              </a:spcAft>
+            </a:pPr>
+            <a:r>
+              <a:rPr sz="1500">
+                <a:solidFill>
+                  <a:srgbClr val="22282E"/>
+                </a:solidFill>
+              </a:rPr>
+              <a:t>•  Importa un pcap representativo (o el lab027.pcapng de clases previas) mediante so-import-pcap:</a:t>
+            </a:r>
+          </a:p>
+          <a:p>
+            <a:pPr>
+              <a:spcAft>
+                <a:spcPts val="600"/>
+              </a:spcAft>
+            </a:pPr>
+            <a:r>
+              <a:rPr sz="1500">
+                <a:solidFill>
+                  <a:srgbClr val="22282E"/>
+                </a:solidFill>
+              </a:rPr>
+              <a:t>•  Explora las alertas en la interfaz (Alerts): identifica qué firmas de Suricata dispararon.</a:t>
+            </a:r>
+          </a:p>
+          <a:p>
+            <a:pPr>
+              <a:spcAft>
+                <a:spcPts val="600"/>
+              </a:spcAft>
+            </a:pPr>
+            <a:r>
+              <a:rPr sz="1500">
+                <a:solidFill>
+                  <a:srgbClr val="22282E"/>
+                </a:solidFill>
+              </a:rPr>
+              <a:t>•  Pivota a los logs de Zeek: para una alerta, abre los registros de sesión (conn.log), HTTP (http.log) y DNS (dns.log) asociados.</a:t>
+            </a:r>
+          </a:p>
+          <a:p>
+            <a:pPr>
+              <a:spcAft>
+                <a:spcPts val="600"/>
+              </a:spcAft>
+            </a:pPr>
+            <a:r>
+              <a:rPr sz="1500">
+                <a:solidFill>
+                  <a:srgbClr val="22282E"/>
+                </a:solidFill>
+              </a:rPr>
+              <a:t>•  Recupera el full content: desde una alerta, extrae el pcap del flujo y ábrelo en Wireshark para el análisis fino.</a:t>
+            </a:r>
+          </a:p>
+          <a:p>
+            <a:pPr>
+              <a:spcAft>
+                <a:spcPts val="600"/>
+              </a:spcAft>
+            </a:pPr>
+            <a:r>
+              <a:rPr sz="1500">
+                <a:solidFill>
+                  <a:srgbClr val="22282E"/>
+                </a:solidFill>
+              </a:rPr>
+              <a:t>•  Recorre el ciclo NSM: documenta detección (alerta) → análisis (logs + pcap) → decisión (falso positivo o incidente) → escalado.</a:t>
+            </a:r>
+          </a:p>
+          <a:p>
+            <a:pPr>
+              <a:spcAft>
+                <a:spcPts val="600"/>
+              </a:spcAft>
+            </a:pPr>
+            <a:r>
+              <a:rPr sz="1500">
+                <a:solidFill>
+                  <a:srgbClr val="22282E"/>
+                </a:solidFill>
+              </a:rPr>
+              <a:t>•  Hunting por hipótesis: plantea "¿hay beaconing hacia un dominio raro?" y búscalo en conn.log/dns.log por frecuencia y regularidad de conexiones.</a:t>
             </a:r>
           </a:p>
         </p:txBody>
